--- a/presentacion/manual_slides.pptx
+++ b/presentacion/manual_slides.pptx
@@ -4125,52 +4125,7 @@
                 </a:solidFill>
                 <a:latin typeface="Segoe UI"/>
               </a:rPr>
-              <a:t>Un </a:t>
-            </a:r>
-            <a:r>
-              <a:rPr sz="3000" b="1" dirty="0" err="1">
-                <a:solidFill>
-                  <a:srgbClr val="E8EAED"/>
-                </a:solidFill>
-                <a:latin typeface="Segoe UI"/>
-              </a:rPr>
-              <a:t>ejemplo</a:t>
-            </a:r>
-            <a:r>
-              <a:rPr sz="3000" b="1" dirty="0">
-                <a:solidFill>
-                  <a:srgbClr val="E8EAED"/>
-                </a:solidFill>
-                <a:latin typeface="Segoe UI"/>
-              </a:rPr>
-              <a:t> real, </a:t>
-            </a:r>
-            <a:r>
-              <a:rPr lang="en-GB" sz="3000" b="1" dirty="0" err="1">
-                <a:solidFill>
-                  <a:srgbClr val="E8EAED"/>
-                </a:solidFill>
-                <a:latin typeface="Segoe UI"/>
-              </a:rPr>
-              <a:t>Arquitectura</a:t>
-            </a:r>
-            <a:r>
-              <a:rPr lang="en-GB" sz="3000" b="1" dirty="0">
-                <a:solidFill>
-                  <a:srgbClr val="E8EAED"/>
-                </a:solidFill>
-                <a:latin typeface="Segoe UI"/>
-              </a:rPr>
-              <a:t> </a:t>
-            </a:r>
-            <a:r>
-              <a:rPr lang="en-GB" sz="3000" b="1" dirty="0" err="1">
-                <a:solidFill>
-                  <a:srgbClr val="E8EAED"/>
-                </a:solidFill>
-                <a:latin typeface="Segoe UI"/>
-              </a:rPr>
-              <a:t>Aplicacion</a:t>
+              <a:t>Un ejemplo real: arquitectura de la aplicación</a:t>
             </a:r>
             <a:endParaRPr sz="3000" b="1" dirty="0">
               <a:solidFill>
